--- a/examples/ppt/charts/charts-radar.pptx
+++ b/examples/ppt/charts/charts-radar.pptx
@@ -5,14 +5,14 @@
     <p:sldMasterId xmlns:r="http://schemas.openxmlformats.org/officeDocument/2006/relationships" id="2147483648" r:id="rId1"/>
   </p:sldMasterIdLst>
   <p:sldIdLst>
-    <p:sldId id="256" r:id="R0fd73d42476e4fbd"/>
-    <p:sldId id="257" r:id="Raeec901afb78459c"/>
-    <p:sldId id="258" r:id="R584c69bb2deb4e68"/>
-    <p:sldId id="259" r:id="R93983ae1e36c43d9"/>
-    <p:sldId id="260" r:id="R43c0038587cc45f5"/>
-    <p:sldId id="261" r:id="Re687145e1d994738"/>
-    <p:sldId id="262" r:id="R4609e0fa14af4f8f"/>
-    <p:sldId id="263" r:id="R486bafca585a494e"/>
+    <p:sldId id="256" r:id="Ra014f752549d4722"/>
+    <p:sldId id="257" r:id="R381a3e4c1e7d4587"/>
+    <p:sldId id="258" r:id="Ree392e6b042f4837"/>
+    <p:sldId id="259" r:id="R6eba9eaadf594eb6"/>
+    <p:sldId id="260" r:id="R6bc19bacca464b1b"/>
+    <p:sldId id="261" r:id="Ra35a57e1b4584e37"/>
+    <p:sldId id="262" r:id="R725fd59fa6084f33"/>
+    <p:sldId id="263" r:id="R5bdcbdeece5e4a2f"/>
   </p:sldIdLst>
   <p:sldSz cx="12192000" cy="6858000"/>
   <p:notesSz cx="6858000" cy="9144000"/>
@@ -287,7 +287,7 @@
 </file>
 
 <file path=ppt/slideMasters/slideMaster1.xml><?xml version="1.0" encoding="utf-8"?>
-<p:sldMaster xmlns:p="http://schemas.openxmlformats.org/presentationml/2006/main">
+<p:sldMaster xmlns:r="http://schemas.openxmlformats.org/officeDocument/2006/relationships" xmlns:p="http://schemas.openxmlformats.org/presentationml/2006/main">
   <p:cSld>
     <p:spTree>
       <p:nvGrpSpPr>
@@ -342,9 +342,11 @@
             <c:v>Model A</c:v>
           </c:tx>
           <c:spPr>
-            <a:solidFill xmlns:a="http://schemas.openxmlformats.org/drawingml/2006/main">
-              <a:srgbClr val="4472C4"/>
-            </a:solidFill>
+            <a:ln xmlns:a="http://schemas.openxmlformats.org/drawingml/2006/main" w="25400">
+              <a:solidFill>
+                <a:srgbClr val="4472C4"/>
+              </a:solidFill>
+            </a:ln>
           </c:spPr>
           <c:cat>
             <c:strLit>
@@ -401,9 +403,11 @@
             <c:v>Model B</c:v>
           </c:tx>
           <c:spPr>
-            <a:solidFill xmlns:a="http://schemas.openxmlformats.org/drawingml/2006/main">
-              <a:srgbClr val="ED7D31"/>
-            </a:solidFill>
+            <a:ln xmlns:a="http://schemas.openxmlformats.org/drawingml/2006/main" w="25400">
+              <a:solidFill>
+                <a:srgbClr val="ED7D31"/>
+              </a:solidFill>
+            </a:ln>
           </c:spPr>
           <c:cat>
             <c:strLit>
@@ -532,9 +536,11 @@
             <c:v>Model A</c:v>
           </c:tx>
           <c:spPr>
-            <a:solidFill xmlns:a="http://schemas.openxmlformats.org/drawingml/2006/main">
-              <a:srgbClr val="4472C4"/>
-            </a:solidFill>
+            <a:ln xmlns:a="http://schemas.openxmlformats.org/drawingml/2006/main" w="25400">
+              <a:solidFill>
+                <a:srgbClr val="4472C4"/>
+              </a:solidFill>
+            </a:ln>
           </c:spPr>
           <c:cat>
             <c:strLit>
@@ -591,9 +597,11 @@
             <c:v>Model B</c:v>
           </c:tx>
           <c:spPr>
-            <a:solidFill xmlns:a="http://schemas.openxmlformats.org/drawingml/2006/main">
-              <a:srgbClr val="ED7D31"/>
-            </a:solidFill>
+            <a:ln xmlns:a="http://schemas.openxmlformats.org/drawingml/2006/main" w="25400">
+              <a:solidFill>
+                <a:srgbClr val="ED7D31"/>
+              </a:solidFill>
+            </a:ln>
           </c:spPr>
           <c:cat>
             <c:strLit>
@@ -729,9 +737,11 @@
             <c:v>A</c:v>
           </c:tx>
           <c:spPr>
-            <a:solidFill xmlns:a="http://schemas.openxmlformats.org/drawingml/2006/main">
-              <a:srgbClr val="4472C4"/>
-            </a:solidFill>
+            <a:ln xmlns:a="http://schemas.openxmlformats.org/drawingml/2006/main" w="25400">
+              <a:solidFill>
+                <a:srgbClr val="4472C4"/>
+              </a:solidFill>
+            </a:ln>
           </c:spPr>
           <c:cat>
             <c:strLit>
@@ -863,9 +873,11 @@
             <c:v>Model A</c:v>
           </c:tx>
           <c:spPr>
-            <a:solidFill xmlns:a="http://schemas.openxmlformats.org/drawingml/2006/main">
-              <a:srgbClr val="4472C4"/>
-            </a:solidFill>
+            <a:ln xmlns:a="http://schemas.openxmlformats.org/drawingml/2006/main" w="25400">
+              <a:solidFill>
+                <a:srgbClr val="4472C4"/>
+              </a:solidFill>
+            </a:ln>
           </c:spPr>
           <c:cat>
             <c:strLit>
@@ -922,9 +934,11 @@
             <c:v>Model B</c:v>
           </c:tx>
           <c:spPr>
-            <a:solidFill xmlns:a="http://schemas.openxmlformats.org/drawingml/2006/main">
-              <a:srgbClr val="ED7D31"/>
-            </a:solidFill>
+            <a:ln xmlns:a="http://schemas.openxmlformats.org/drawingml/2006/main" w="25400">
+              <a:solidFill>
+                <a:srgbClr val="ED7D31"/>
+              </a:solidFill>
+            </a:ln>
           </c:spPr>
           <c:cat>
             <c:strLit>
@@ -1053,9 +1067,11 @@
             <c:v>A</c:v>
           </c:tx>
           <c:spPr>
-            <a:solidFill xmlns:a="http://schemas.openxmlformats.org/drawingml/2006/main">
-              <a:srgbClr val="4472C4"/>
-            </a:solidFill>
+            <a:ln xmlns:a="http://schemas.openxmlformats.org/drawingml/2006/main" w="25400">
+              <a:solidFill>
+                <a:srgbClr val="4472C4"/>
+              </a:solidFill>
+            </a:ln>
           </c:spPr>
           <c:cat>
             <c:strLit>
@@ -1213,9 +1229,11 @@
             <c:v>A</c:v>
           </c:tx>
           <c:spPr>
-            <a:solidFill xmlns:a="http://schemas.openxmlformats.org/drawingml/2006/main">
-              <a:srgbClr val="4472C4"/>
-            </a:solidFill>
+            <a:ln xmlns:a="http://schemas.openxmlformats.org/drawingml/2006/main" w="25400">
+              <a:solidFill>
+                <a:srgbClr val="4472C4"/>
+              </a:solidFill>
+            </a:ln>
           </c:spPr>
           <c:cat>
             <c:strLit>
@@ -1357,9 +1375,11 @@
             <c:v>A</c:v>
           </c:tx>
           <c:spPr>
-            <a:solidFill xmlns:a="http://schemas.openxmlformats.org/drawingml/2006/main">
-              <a:srgbClr val="4472C4"/>
-            </a:solidFill>
+            <a:ln xmlns:a="http://schemas.openxmlformats.org/drawingml/2006/main" w="25400">
+              <a:solidFill>
+                <a:srgbClr val="4472C4"/>
+              </a:solidFill>
+            </a:ln>
           </c:spPr>
           <c:cat>
             <c:strLit>
@@ -1500,9 +1520,11 @@
             <c:v>A</c:v>
           </c:tx>
           <c:spPr>
-            <a:solidFill xmlns:a="http://schemas.openxmlformats.org/drawingml/2006/main">
-              <a:srgbClr val="4472C4"/>
-            </a:solidFill>
+            <a:ln xmlns:a="http://schemas.openxmlformats.org/drawingml/2006/main" w="25400">
+              <a:solidFill>
+                <a:srgbClr val="4472C4"/>
+              </a:solidFill>
+            </a:ln>
           </c:spPr>
           <c:cat>
             <c:strLit>
@@ -1627,9 +1649,6 @@
             <c:v>Model A</c:v>
           </c:tx>
           <c:spPr>
-            <a:solidFill xmlns:a="http://schemas.openxmlformats.org/drawingml/2006/main">
-              <a:srgbClr val="4472C4"/>
-            </a:solidFill>
             <a:ln xmlns:a="http://schemas.openxmlformats.org/drawingml/2006/main" w="6350">
               <a:solidFill>
                 <a:srgbClr val="000000"/>
@@ -1691,9 +1710,6 @@
             <c:v>Model B</c:v>
           </c:tx>
           <c:spPr>
-            <a:solidFill xmlns:a="http://schemas.openxmlformats.org/drawingml/2006/main">
-              <a:srgbClr val="ED7D31"/>
-            </a:solidFill>
             <a:ln xmlns:a="http://schemas.openxmlformats.org/drawingml/2006/main" w="6350">
               <a:solidFill>
                 <a:srgbClr val="000000"/>
@@ -1838,6 +1854,11 @@
               </a:gsLst>
               <a:lin ang="0" scaled="1"/>
             </a:gradFill>
+            <a:ln xmlns:a="http://schemas.openxmlformats.org/drawingml/2006/main" w="25400">
+              <a:solidFill>
+                <a:srgbClr val="4472C4"/>
+              </a:solidFill>
+            </a:ln>
             <a:effectLst xmlns:a="http://schemas.openxmlformats.org/drawingml/2006/main">
               <a:outerShdw blurRad="63500" dist="38100" dir="2700000" algn="tl" rotWithShape="0">
                 <a:srgbClr val="000000">
@@ -1969,11 +1990,11 @@
             <c:v>Model A</c:v>
           </c:tx>
           <c:spPr>
-            <a:solidFill xmlns:a="http://schemas.openxmlformats.org/drawingml/2006/main">
-              <a:srgbClr val="4472C4">
-                <a:alpha val="60000"/>
-              </a:srgbClr>
-            </a:solidFill>
+            <a:ln xmlns:a="http://schemas.openxmlformats.org/drawingml/2006/main" w="25400">
+              <a:solidFill>
+                <a:srgbClr val="4472C4"/>
+              </a:solidFill>
+            </a:ln>
           </c:spPr>
           <c:cat>
             <c:strLit>
@@ -2030,11 +2051,11 @@
             <c:v>Model B</c:v>
           </c:tx>
           <c:spPr>
-            <a:solidFill xmlns:a="http://schemas.openxmlformats.org/drawingml/2006/main">
-              <a:srgbClr val="ED7D31">
-                <a:alpha val="60000"/>
-              </a:srgbClr>
-            </a:solidFill>
+            <a:ln xmlns:a="http://schemas.openxmlformats.org/drawingml/2006/main" w="25400">
+              <a:solidFill>
+                <a:srgbClr val="ED7D31"/>
+              </a:solidFill>
+            </a:ln>
           </c:spPr>
           <c:cat>
             <c:strLit>
@@ -2163,9 +2184,11 @@
             <c:v>Model A</c:v>
           </c:tx>
           <c:spPr>
-            <a:solidFill xmlns:a="http://schemas.openxmlformats.org/drawingml/2006/main">
-              <a:srgbClr val="4472C4"/>
-            </a:solidFill>
+            <a:ln xmlns:a="http://schemas.openxmlformats.org/drawingml/2006/main" w="25400">
+              <a:solidFill>
+                <a:srgbClr val="4472C4"/>
+              </a:solidFill>
+            </a:ln>
           </c:spPr>
           <c:cat>
             <c:strLit>
@@ -2222,9 +2245,11 @@
             <c:v>Model B</c:v>
           </c:tx>
           <c:spPr>
-            <a:solidFill xmlns:a="http://schemas.openxmlformats.org/drawingml/2006/main">
-              <a:srgbClr val="ED7D31"/>
-            </a:solidFill>
+            <a:ln xmlns:a="http://schemas.openxmlformats.org/drawingml/2006/main" w="25400">
+              <a:solidFill>
+                <a:srgbClr val="ED7D31"/>
+              </a:solidFill>
+            </a:ln>
           </c:spPr>
           <c:cat>
             <c:strLit>
@@ -2364,6 +2389,11 @@
               </a:gsLst>
               <a:lin ang="0" scaled="1"/>
             </a:gradFill>
+            <a:ln xmlns:a="http://schemas.openxmlformats.org/drawingml/2006/main" w="25400">
+              <a:solidFill>
+                <a:srgbClr val="4472C4"/>
+              </a:solidFill>
+            </a:ln>
           </c:spPr>
           <c:cat>
             <c:strLit>
@@ -2431,6 +2461,11 @@
               </a:gsLst>
               <a:lin ang="0" scaled="1"/>
             </a:gradFill>
+            <a:ln xmlns:a="http://schemas.openxmlformats.org/drawingml/2006/main" w="25400">
+              <a:solidFill>
+                <a:srgbClr val="ED7D31"/>
+              </a:solidFill>
+            </a:ln>
           </c:spPr>
           <c:cat>
             <c:strLit>
@@ -2559,9 +2594,11 @@
             <c:v>A</c:v>
           </c:tx>
           <c:spPr>
-            <a:solidFill xmlns:a="http://schemas.openxmlformats.org/drawingml/2006/main">
-              <a:srgbClr val="4472C4"/>
-            </a:solidFill>
+            <a:ln xmlns:a="http://schemas.openxmlformats.org/drawingml/2006/main" w="25400">
+              <a:solidFill>
+                <a:srgbClr val="4472C4"/>
+              </a:solidFill>
+            </a:ln>
           </c:spPr>
           <c:marker>
             <c:symbol val="circle"/>
@@ -2695,9 +2732,11 @@
             <c:v>A</c:v>
           </c:tx>
           <c:spPr>
-            <a:solidFill xmlns:a="http://schemas.openxmlformats.org/drawingml/2006/main">
-              <a:srgbClr val="4472C4"/>
-            </a:solidFill>
+            <a:ln xmlns:a="http://schemas.openxmlformats.org/drawingml/2006/main" w="25400">
+              <a:solidFill>
+                <a:srgbClr val="4472C4"/>
+              </a:solidFill>
+            </a:ln>
           </c:spPr>
           <c:marker>
             <c:symbol val="square"/>
@@ -2831,9 +2870,11 @@
             <c:v>A</c:v>
           </c:tx>
           <c:spPr>
-            <a:solidFill xmlns:a="http://schemas.openxmlformats.org/drawingml/2006/main">
-              <a:srgbClr val="4472C4"/>
-            </a:solidFill>
+            <a:ln xmlns:a="http://schemas.openxmlformats.org/drawingml/2006/main" w="25400">
+              <a:solidFill>
+                <a:srgbClr val="4472C4"/>
+              </a:solidFill>
+            </a:ln>
           </c:spPr>
           <c:marker>
             <c:symbol val="diamond"/>
@@ -2962,9 +3003,11 @@
             <c:v>A</c:v>
           </c:tx>
           <c:spPr>
-            <a:solidFill xmlns:a="http://schemas.openxmlformats.org/drawingml/2006/main">
-              <a:srgbClr val="4472C4"/>
-            </a:solidFill>
+            <a:ln xmlns:a="http://schemas.openxmlformats.org/drawingml/2006/main" w="25400">
+              <a:solidFill>
+                <a:srgbClr val="4472C4"/>
+              </a:solidFill>
+            </a:ln>
           </c:spPr>
           <c:marker>
             <c:symbol val="triangle"/>
@@ -3098,9 +3141,11 @@
             <c:v>Model A</c:v>
           </c:tx>
           <c:spPr>
-            <a:solidFill xmlns:a="http://schemas.openxmlformats.org/drawingml/2006/main">
-              <a:srgbClr val="4472C4"/>
-            </a:solidFill>
+            <a:ln xmlns:a="http://schemas.openxmlformats.org/drawingml/2006/main" w="25400">
+              <a:solidFill>
+                <a:srgbClr val="4472C4"/>
+              </a:solidFill>
+            </a:ln>
           </c:spPr>
           <c:cat>
             <c:strLit>
@@ -3157,9 +3202,11 @@
             <c:v>Model B</c:v>
           </c:tx>
           <c:spPr>
-            <a:solidFill xmlns:a="http://schemas.openxmlformats.org/drawingml/2006/main">
-              <a:srgbClr val="ED7D31"/>
-            </a:solidFill>
+            <a:ln xmlns:a="http://schemas.openxmlformats.org/drawingml/2006/main" w="25400">
+              <a:solidFill>
+                <a:srgbClr val="ED7D31"/>
+              </a:solidFill>
+            </a:ln>
           </c:spPr>
           <c:cat>
             <c:strLit>
@@ -3309,9 +3356,11 @@
             <c:v>Model A</c:v>
           </c:tx>
           <c:spPr>
-            <a:solidFill xmlns:a="http://schemas.openxmlformats.org/drawingml/2006/main">
-              <a:srgbClr val="4472C4"/>
-            </a:solidFill>
+            <a:ln xmlns:a="http://schemas.openxmlformats.org/drawingml/2006/main" w="25400">
+              <a:solidFill>
+                <a:srgbClr val="4472C4"/>
+              </a:solidFill>
+            </a:ln>
           </c:spPr>
           <c:cat>
             <c:strLit>
@@ -3368,9 +3417,11 @@
             <c:v>Model B</c:v>
           </c:tx>
           <c:spPr>
-            <a:solidFill xmlns:a="http://schemas.openxmlformats.org/drawingml/2006/main">
-              <a:srgbClr val="ED7D31"/>
-            </a:solidFill>
+            <a:ln xmlns:a="http://schemas.openxmlformats.org/drawingml/2006/main" w="25400">
+              <a:solidFill>
+                <a:srgbClr val="ED7D31"/>
+              </a:solidFill>
+            </a:ln>
           </c:spPr>
           <c:cat>
             <c:strLit>
@@ -3506,9 +3557,11 @@
             <c:v>A</c:v>
           </c:tx>
           <c:spPr>
-            <a:solidFill xmlns:a="http://schemas.openxmlformats.org/drawingml/2006/main">
-              <a:srgbClr val="4472C4"/>
-            </a:solidFill>
+            <a:ln xmlns:a="http://schemas.openxmlformats.org/drawingml/2006/main" w="25400">
+              <a:solidFill>
+                <a:srgbClr val="4472C4"/>
+              </a:solidFill>
+            </a:ln>
           </c:spPr>
           <c:cat>
             <c:strLit>
@@ -3636,9 +3689,11 @@
             <c:v>Model A</c:v>
           </c:tx>
           <c:spPr>
-            <a:solidFill xmlns:a="http://schemas.openxmlformats.org/drawingml/2006/main">
-              <a:srgbClr val="4472C4"/>
-            </a:solidFill>
+            <a:ln xmlns:a="http://schemas.openxmlformats.org/drawingml/2006/main" w="25400">
+              <a:solidFill>
+                <a:srgbClr val="4472C4"/>
+              </a:solidFill>
+            </a:ln>
           </c:spPr>
           <c:cat>
             <c:strLit>
@@ -3695,9 +3750,11 @@
             <c:v>Model B</c:v>
           </c:tx>
           <c:spPr>
-            <a:solidFill xmlns:a="http://schemas.openxmlformats.org/drawingml/2006/main">
-              <a:srgbClr val="ED7D31"/>
-            </a:solidFill>
+            <a:ln xmlns:a="http://schemas.openxmlformats.org/drawingml/2006/main" w="25400">
+              <a:solidFill>
+                <a:srgbClr val="ED7D31"/>
+              </a:solidFill>
+            </a:ln>
           </c:spPr>
           <c:cat>
             <c:strLit>
@@ -3830,9 +3887,6 @@
             <c:v>Model A</c:v>
           </c:tx>
           <c:spPr>
-            <a:solidFill xmlns:a="http://schemas.openxmlformats.org/drawingml/2006/main">
-              <a:srgbClr val="4472C4"/>
-            </a:solidFill>
             <a:ln xmlns:a="http://schemas.openxmlformats.org/drawingml/2006/main" w="25400">
               <a:solidFill>
                 <a:srgbClr val="4472C4"/>
@@ -3894,9 +3948,6 @@
             <c:v>Model B</c:v>
           </c:tx>
           <c:spPr>
-            <a:solidFill xmlns:a="http://schemas.openxmlformats.org/drawingml/2006/main">
-              <a:srgbClr val="ED7D31"/>
-            </a:solidFill>
             <a:ln xmlns:a="http://schemas.openxmlformats.org/drawingml/2006/main" w="25400">
               <a:solidFill>
                 <a:srgbClr val="ED7D31"/>
@@ -4083,9 +4134,11 @@
             <c:v>Model A</c:v>
           </c:tx>
           <c:spPr>
-            <a:solidFill xmlns:a="http://schemas.openxmlformats.org/drawingml/2006/main">
-              <a:srgbClr val="4472C4"/>
-            </a:solidFill>
+            <a:ln xmlns:a="http://schemas.openxmlformats.org/drawingml/2006/main" w="25400">
+              <a:solidFill>
+                <a:srgbClr val="4472C4"/>
+              </a:solidFill>
+            </a:ln>
           </c:spPr>
           <c:cat>
             <c:strLit>
@@ -4142,9 +4195,11 @@
             <c:v>Model B</c:v>
           </c:tx>
           <c:spPr>
-            <a:solidFill xmlns:a="http://schemas.openxmlformats.org/drawingml/2006/main">
-              <a:srgbClr val="ED7D31"/>
-            </a:solidFill>
+            <a:ln xmlns:a="http://schemas.openxmlformats.org/drawingml/2006/main" w="25400">
+              <a:solidFill>
+                <a:srgbClr val="ED7D31"/>
+              </a:solidFill>
+            </a:ln>
           </c:spPr>
           <c:cat>
             <c:strLit>
@@ -4278,9 +4333,6 @@
             <c:v>Model A</c:v>
           </c:tx>
           <c:spPr>
-            <a:solidFill xmlns:a="http://schemas.openxmlformats.org/drawingml/2006/main">
-              <a:srgbClr val="5B9BD5"/>
-            </a:solidFill>
             <a:ln xmlns:a="http://schemas.openxmlformats.org/drawingml/2006/main" w="25400">
               <a:solidFill>
                 <a:srgbClr val="5B9BD5"/>
@@ -4342,9 +4394,6 @@
             <c:v>Model B</c:v>
           </c:tx>
           <c:spPr>
-            <a:solidFill xmlns:a="http://schemas.openxmlformats.org/drawingml/2006/main">
-              <a:srgbClr val="FF6B6B"/>
-            </a:solidFill>
             <a:ln xmlns:a="http://schemas.openxmlformats.org/drawingml/2006/main" w="25400">
               <a:solidFill>
                 <a:srgbClr val="FF6B6B"/>
@@ -4559,9 +4608,6 @@
             <c:v>Model A</c:v>
           </c:tx>
           <c:spPr>
-            <a:solidFill xmlns:a="http://schemas.openxmlformats.org/drawingml/2006/main">
-              <a:srgbClr val="2E75B6"/>
-            </a:solidFill>
             <a:ln xmlns:a="http://schemas.openxmlformats.org/drawingml/2006/main" w="25400">
               <a:solidFill>
                 <a:srgbClr val="2E75B6"/>
@@ -4623,9 +4669,6 @@
             <c:v>Model B</c:v>
           </c:tx>
           <c:spPr>
-            <a:solidFill xmlns:a="http://schemas.openxmlformats.org/drawingml/2006/main">
-              <a:srgbClr val="44546A"/>
-            </a:solidFill>
             <a:ln xmlns:a="http://schemas.openxmlformats.org/drawingml/2006/main" w="25400">
               <a:solidFill>
                 <a:srgbClr val="44546A"/>
@@ -4831,9 +4874,6 @@
             <c:v>Renamed A</c:v>
           </c:tx>
           <c:spPr>
-            <a:solidFill xmlns:a="http://schemas.openxmlformats.org/drawingml/2006/main">
-              <a:srgbClr val="C00000"/>
-            </a:solidFill>
             <a:ln xmlns:a="http://schemas.openxmlformats.org/drawingml/2006/main" w="25400">
               <a:solidFill>
                 <a:srgbClr val="C00000"/>
@@ -4899,9 +4939,11 @@
             <c:v>Model B</c:v>
           </c:tx>
           <c:spPr>
-            <a:solidFill xmlns:a="http://schemas.openxmlformats.org/drawingml/2006/main">
-              <a:srgbClr val="ED7D31"/>
-            </a:solidFill>
+            <a:ln xmlns:a="http://schemas.openxmlformats.org/drawingml/2006/main" w="25400">
+              <a:solidFill>
+                <a:srgbClr val="ED7D31"/>
+              </a:solidFill>
+            </a:ln>
           </c:spPr>
           <c:cat>
             <c:strLit>
@@ -5030,9 +5072,11 @@
             <c:v>A</c:v>
           </c:tx>
           <c:spPr>
-            <a:solidFill xmlns:a="http://schemas.openxmlformats.org/drawingml/2006/main">
-              <a:srgbClr val="4472C4"/>
-            </a:solidFill>
+            <a:ln xmlns:a="http://schemas.openxmlformats.org/drawingml/2006/main" w="25400">
+              <a:solidFill>
+                <a:srgbClr val="4472C4"/>
+              </a:solidFill>
+            </a:ln>
           </c:spPr>
           <c:cat>
             <c:strLit>
@@ -5167,9 +5211,11 @@
             <c:v>Model A</c:v>
           </c:tx>
           <c:spPr>
-            <a:solidFill xmlns:a="http://schemas.openxmlformats.org/drawingml/2006/main">
-              <a:srgbClr val="4472C4"/>
-            </a:solidFill>
+            <a:ln xmlns:a="http://schemas.openxmlformats.org/drawingml/2006/main" w="25400">
+              <a:solidFill>
+                <a:srgbClr val="4472C4"/>
+              </a:solidFill>
+            </a:ln>
           </c:spPr>
           <c:cat>
             <c:strLit>
@@ -5226,9 +5272,11 @@
             <c:v>Model B</c:v>
           </c:tx>
           <c:spPr>
-            <a:solidFill xmlns:a="http://schemas.openxmlformats.org/drawingml/2006/main">
-              <a:srgbClr val="ED7D31"/>
-            </a:solidFill>
+            <a:ln xmlns:a="http://schemas.openxmlformats.org/drawingml/2006/main" w="25400">
+              <a:solidFill>
+                <a:srgbClr val="ED7D31"/>
+              </a:solidFill>
+            </a:ln>
           </c:spPr>
           <c:cat>
             <c:strLit>
@@ -5357,9 +5405,11 @@
             <c:v>Model A</c:v>
           </c:tx>
           <c:spPr>
-            <a:solidFill xmlns:a="http://schemas.openxmlformats.org/drawingml/2006/main">
-              <a:srgbClr val="4472C4"/>
-            </a:solidFill>
+            <a:ln xmlns:a="http://schemas.openxmlformats.org/drawingml/2006/main" w="25400">
+              <a:solidFill>
+                <a:srgbClr val="4472C4"/>
+              </a:solidFill>
+            </a:ln>
           </c:spPr>
           <c:cat>
             <c:strLit>
@@ -5416,9 +5466,11 @@
             <c:v>Model B</c:v>
           </c:tx>
           <c:spPr>
-            <a:solidFill xmlns:a="http://schemas.openxmlformats.org/drawingml/2006/main">
-              <a:srgbClr val="ED7D31"/>
-            </a:solidFill>
+            <a:ln xmlns:a="http://schemas.openxmlformats.org/drawingml/2006/main" w="25400">
+              <a:solidFill>
+                <a:srgbClr val="ED7D31"/>
+              </a:solidFill>
+            </a:ln>
           </c:spPr>
           <c:cat>
             <c:strLit>
@@ -5562,9 +5614,11 @@
             <c:v>Model A</c:v>
           </c:tx>
           <c:spPr>
-            <a:solidFill xmlns:a="http://schemas.openxmlformats.org/drawingml/2006/main">
-              <a:srgbClr val="4472C4"/>
-            </a:solidFill>
+            <a:ln xmlns:a="http://schemas.openxmlformats.org/drawingml/2006/main" w="25400">
+              <a:solidFill>
+                <a:srgbClr val="4472C4"/>
+              </a:solidFill>
+            </a:ln>
           </c:spPr>
           <c:cat>
             <c:strLit>
@@ -5621,9 +5675,11 @@
             <c:v>Model B</c:v>
           </c:tx>
           <c:spPr>
-            <a:solidFill xmlns:a="http://schemas.openxmlformats.org/drawingml/2006/main">
-              <a:srgbClr val="ED7D31"/>
-            </a:solidFill>
+            <a:ln xmlns:a="http://schemas.openxmlformats.org/drawingml/2006/main" w="25400">
+              <a:solidFill>
+                <a:srgbClr val="ED7D31"/>
+              </a:solidFill>
+            </a:ln>
           </c:spPr>
           <c:cat>
             <c:strLit>
@@ -5735,9 +5791,11 @@
             <c:v>Model A</c:v>
           </c:tx>
           <c:spPr>
-            <a:solidFill xmlns:a="http://schemas.openxmlformats.org/drawingml/2006/main">
-              <a:srgbClr val="4472C4"/>
-            </a:solidFill>
+            <a:ln xmlns:a="http://schemas.openxmlformats.org/drawingml/2006/main" w="25400">
+              <a:solidFill>
+                <a:srgbClr val="4472C4"/>
+              </a:solidFill>
+            </a:ln>
           </c:spPr>
           <c:cat>
             <c:strLit>
@@ -5794,9 +5852,11 @@
             <c:v>Model B</c:v>
           </c:tx>
           <c:spPr>
-            <a:solidFill xmlns:a="http://schemas.openxmlformats.org/drawingml/2006/main">
-              <a:srgbClr val="ED7D31"/>
-            </a:solidFill>
+            <a:ln xmlns:a="http://schemas.openxmlformats.org/drawingml/2006/main" w="25400">
+              <a:solidFill>
+                <a:srgbClr val="ED7D31"/>
+              </a:solidFill>
+            </a:ln>
           </c:spPr>
           <c:cat>
             <c:strLit>
@@ -5921,9 +5981,11 @@
             <c:v>A</c:v>
           </c:tx>
           <c:spPr>
-            <a:solidFill xmlns:a="http://schemas.openxmlformats.org/drawingml/2006/main">
-              <a:srgbClr val="4472C4"/>
-            </a:solidFill>
+            <a:ln xmlns:a="http://schemas.openxmlformats.org/drawingml/2006/main" w="25400">
+              <a:solidFill>
+                <a:srgbClr val="4472C4"/>
+              </a:solidFill>
+            </a:ln>
           </c:spPr>
           <c:cat>
             <c:strLit>
@@ -5979,10 +6041,12 @@
             <a:lstStyle xmlns:a="http://schemas.openxmlformats.org/drawingml/2006/main"/>
             <a:p xmlns:a="http://schemas.openxmlformats.org/drawingml/2006/main">
               <a:pPr>
-                <a:defRPr sz="900" b="0">
+                <a:defRPr sz="900">
                   <a:solidFill>
                     <a:srgbClr val="333333"/>
                   </a:solidFill>
+                  <a:latin typeface="Calibri"/>
+                  <a:ea typeface="Calibri"/>
                 </a:defRPr>
               </a:pPr>
             </a:p>
@@ -6047,8 +6111,8 @@
       <p:grpSpPr/>
       <p:sp>
         <p:nvSpPr>
-          <p:cNvPr id="10000" name="TextBox 1"/>
-          <p:cNvSpPr/>
+          <p:cNvPr id="100000" name="TextBox 1"/>
+          <p:cNvSpPr txBox="1"/>
           <p:nvPr/>
         </p:nvSpPr>
         <p:spPr>
@@ -6075,7 +6139,7 @@
       </p:sp>
       <p:graphicFrame>
         <p:nvGraphicFramePr>
-          <p:cNvPr id="10001" name="radarstyle=standard"/>
+          <p:cNvPr id="100001" name="radarstyle=standard"/>
           <p:cNvGraphicFramePr/>
           <p:nvPr/>
         </p:nvGraphicFramePr>
@@ -6085,13 +6149,13 @@
         </p:xfrm>
         <a:graphic xmlns:a="http://schemas.openxmlformats.org/drawingml/2006/main">
           <a:graphicData uri="http://schemas.openxmlformats.org/drawingml/2006/chart">
-            <c:chart xmlns:r="http://schemas.openxmlformats.org/officeDocument/2006/relationships" xmlns:c="http://schemas.openxmlformats.org/drawingml/2006/chart" r:id="Re5c9303041794fcd"/>
+            <c:chart xmlns:r="http://schemas.openxmlformats.org/officeDocument/2006/relationships" xmlns:c="http://schemas.openxmlformats.org/drawingml/2006/chart" r:id="Rab8ad151769c4277"/>
           </a:graphicData>
         </a:graphic>
       </p:graphicFrame>
       <p:graphicFrame>
         <p:nvGraphicFramePr>
-          <p:cNvPr id="10002" name="radarstyle=marker"/>
+          <p:cNvPr id="100002" name="radarstyle=marker"/>
           <p:cNvGraphicFramePr/>
           <p:nvPr/>
         </p:nvGraphicFramePr>
@@ -6101,13 +6165,13 @@
         </p:xfrm>
         <a:graphic xmlns:a="http://schemas.openxmlformats.org/drawingml/2006/main">
           <a:graphicData uri="http://schemas.openxmlformats.org/drawingml/2006/chart">
-            <c:chart xmlns:r="http://schemas.openxmlformats.org/officeDocument/2006/relationships" xmlns:c="http://schemas.openxmlformats.org/drawingml/2006/chart" r:id="Rd4fdd41dfa1a4950"/>
+            <c:chart xmlns:r="http://schemas.openxmlformats.org/officeDocument/2006/relationships" xmlns:c="http://schemas.openxmlformats.org/drawingml/2006/chart" r:id="R8080ef4877254531"/>
           </a:graphicData>
         </a:graphic>
       </p:graphicFrame>
       <p:graphicFrame>
         <p:nvGraphicFramePr>
-          <p:cNvPr id="10003" name="radarstyle=filled"/>
+          <p:cNvPr id="100003" name="radarstyle=filled"/>
           <p:cNvGraphicFramePr/>
           <p:nvPr/>
         </p:nvGraphicFramePr>
@@ -6117,13 +6181,13 @@
         </p:xfrm>
         <a:graphic xmlns:a="http://schemas.openxmlformats.org/drawingml/2006/main">
           <a:graphicData uri="http://schemas.openxmlformats.org/drawingml/2006/chart">
-            <c:chart xmlns:r="http://schemas.openxmlformats.org/officeDocument/2006/relationships" xmlns:c="http://schemas.openxmlformats.org/drawingml/2006/chart" r:id="R5d654e22bc25469b"/>
+            <c:chart xmlns:r="http://schemas.openxmlformats.org/officeDocument/2006/relationships" xmlns:c="http://schemas.openxmlformats.org/drawingml/2006/chart" r:id="R6b00bfc1ec724f08"/>
           </a:graphicData>
         </a:graphic>
       </p:graphicFrame>
       <p:graphicFrame>
         <p:nvGraphicFramePr>
-          <p:cNvPr id="10004" name="single series"/>
+          <p:cNvPr id="100004" name="single series"/>
           <p:cNvGraphicFramePr/>
           <p:nvPr/>
         </p:nvGraphicFramePr>
@@ -6133,7 +6197,7 @@
         </p:xfrm>
         <a:graphic xmlns:a="http://schemas.openxmlformats.org/drawingml/2006/main">
           <a:graphicData uri="http://schemas.openxmlformats.org/drawingml/2006/chart">
-            <c:chart xmlns:r="http://schemas.openxmlformats.org/officeDocument/2006/relationships" xmlns:c="http://schemas.openxmlformats.org/drawingml/2006/chart" r:id="Rf45b39d2da66440a"/>
+            <c:chart xmlns:r="http://schemas.openxmlformats.org/officeDocument/2006/relationships" xmlns:c="http://schemas.openxmlformats.org/drawingml/2006/chart" r:id="Rea9e7bd632dd4900"/>
           </a:graphicData>
         </a:graphic>
       </p:graphicFrame>
@@ -6154,8 +6218,8 @@
       <p:grpSpPr/>
       <p:sp>
         <p:nvSpPr>
-          <p:cNvPr id="10005" name="TextBox 1"/>
-          <p:cNvSpPr/>
+          <p:cNvPr id="100005" name="TextBox 1"/>
+          <p:cNvSpPr txBox="1"/>
           <p:nvPr/>
         </p:nvSpPr>
         <p:spPr>
@@ -6182,7 +6246,7 @@
       </p:sp>
       <p:graphicFrame>
         <p:nvGraphicFramePr>
-          <p:cNvPr id="10006" name="Styled title"/>
+          <p:cNvPr id="100006" name="Styled title"/>
           <p:cNvGraphicFramePr/>
           <p:nvPr/>
         </p:nvGraphicFramePr>
@@ -6192,13 +6256,13 @@
         </p:xfrm>
         <a:graphic xmlns:a="http://schemas.openxmlformats.org/drawingml/2006/main">
           <a:graphicData uri="http://schemas.openxmlformats.org/drawingml/2006/chart">
-            <c:chart xmlns:r="http://schemas.openxmlformats.org/officeDocument/2006/relationships" xmlns:c="http://schemas.openxmlformats.org/drawingml/2006/chart" r:id="Ra12338d5c9964c7e"/>
+            <c:chart xmlns:r="http://schemas.openxmlformats.org/officeDocument/2006/relationships" xmlns:c="http://schemas.openxmlformats.org/drawingml/2006/chart" r:id="R64af66eb65ee4125"/>
           </a:graphicData>
         </a:graphic>
       </p:graphicFrame>
       <p:graphicFrame>
         <p:nvGraphicFramePr>
-          <p:cNvPr id="10007" name="legend=top + legendFont"/>
+          <p:cNvPr id="100007" name="legend=top + legendFont"/>
           <p:cNvGraphicFramePr/>
           <p:nvPr/>
         </p:nvGraphicFramePr>
@@ -6208,13 +6272,13 @@
         </p:xfrm>
         <a:graphic xmlns:a="http://schemas.openxmlformats.org/drawingml/2006/main">
           <a:graphicData uri="http://schemas.openxmlformats.org/drawingml/2006/chart">
-            <c:chart xmlns:r="http://schemas.openxmlformats.org/officeDocument/2006/relationships" xmlns:c="http://schemas.openxmlformats.org/drawingml/2006/chart" r:id="Rcf1547bd7dc84fdd"/>
+            <c:chart xmlns:r="http://schemas.openxmlformats.org/officeDocument/2006/relationships" xmlns:c="http://schemas.openxmlformats.org/drawingml/2006/chart" r:id="R7bf551528f77461c"/>
           </a:graphicData>
         </a:graphic>
       </p:graphicFrame>
       <p:graphicFrame>
         <p:nvGraphicFramePr>
-          <p:cNvPr id="10008" name="legend.overlay=true"/>
+          <p:cNvPr id="100008" name="legend.overlay=true"/>
           <p:cNvGraphicFramePr/>
           <p:nvPr/>
         </p:nvGraphicFramePr>
@@ -6224,13 +6288,13 @@
         </p:xfrm>
         <a:graphic xmlns:a="http://schemas.openxmlformats.org/drawingml/2006/main">
           <a:graphicData uri="http://schemas.openxmlformats.org/drawingml/2006/chart">
-            <c:chart xmlns:r="http://schemas.openxmlformats.org/officeDocument/2006/relationships" xmlns:c="http://schemas.openxmlformats.org/drawingml/2006/chart" r:id="R7587a50df72248c0"/>
+            <c:chart xmlns:r="http://schemas.openxmlformats.org/officeDocument/2006/relationships" xmlns:c="http://schemas.openxmlformats.org/drawingml/2006/chart" r:id="R255307a375664587"/>
           </a:graphicData>
         </a:graphic>
       </p:graphicFrame>
       <p:graphicFrame>
         <p:nvGraphicFramePr>
-          <p:cNvPr id="10009" name="Chart 4"/>
+          <p:cNvPr id="100009" name="Chart 4"/>
           <p:cNvGraphicFramePr/>
           <p:nvPr/>
         </p:nvGraphicFramePr>
@@ -6240,7 +6304,7 @@
         </p:xfrm>
         <a:graphic xmlns:a="http://schemas.openxmlformats.org/drawingml/2006/main">
           <a:graphicData uri="http://schemas.openxmlformats.org/drawingml/2006/chart">
-            <c:chart xmlns:r="http://schemas.openxmlformats.org/officeDocument/2006/relationships" xmlns:c="http://schemas.openxmlformats.org/drawingml/2006/chart" r:id="Rfa4d3067d7024cd8"/>
+            <c:chart xmlns:r="http://schemas.openxmlformats.org/officeDocument/2006/relationships" xmlns:c="http://schemas.openxmlformats.org/drawingml/2006/chart" r:id="R654f4a1ef6ac4c86"/>
           </a:graphicData>
         </a:graphic>
       </p:graphicFrame>
@@ -6261,8 +6325,8 @@
       <p:grpSpPr/>
       <p:sp>
         <p:nvSpPr>
-          <p:cNvPr id="10010" name="TextBox 1"/>
-          <p:cNvSpPr/>
+          <p:cNvPr id="100010" name="TextBox 1"/>
+          <p:cNvSpPr txBox="1"/>
           <p:nvPr/>
         </p:nvSpPr>
         <p:spPr>
@@ -6289,7 +6353,7 @@
       </p:sp>
       <p:graphicFrame>
         <p:nvGraphicFramePr>
-          <p:cNvPr id="10011" name="value"/>
+          <p:cNvPr id="100011" name="value"/>
           <p:cNvGraphicFramePr/>
           <p:nvPr/>
         </p:nvGraphicFramePr>
@@ -6299,13 +6363,13 @@
         </p:xfrm>
         <a:graphic xmlns:a="http://schemas.openxmlformats.org/drawingml/2006/main">
           <a:graphicData uri="http://schemas.openxmlformats.org/drawingml/2006/chart">
-            <c:chart xmlns:r="http://schemas.openxmlformats.org/officeDocument/2006/relationships" xmlns:c="http://schemas.openxmlformats.org/drawingml/2006/chart" r:id="R2d85c540002a414a"/>
+            <c:chart xmlns:r="http://schemas.openxmlformats.org/officeDocument/2006/relationships" xmlns:c="http://schemas.openxmlformats.org/drawingml/2006/chart" r:id="Rd08932a3914049f6"/>
           </a:graphicData>
         </a:graphic>
       </p:graphicFrame>
       <p:graphicFrame>
         <p:nvGraphicFramePr>
-          <p:cNvPr id="10012" name="value,series"/>
+          <p:cNvPr id="100012" name="value,series"/>
           <p:cNvGraphicFramePr/>
           <p:nvPr/>
         </p:nvGraphicFramePr>
@@ -6315,13 +6379,13 @@
         </p:xfrm>
         <a:graphic xmlns:a="http://schemas.openxmlformats.org/drawingml/2006/main">
           <a:graphicData uri="http://schemas.openxmlformats.org/drawingml/2006/chart">
-            <c:chart xmlns:r="http://schemas.openxmlformats.org/officeDocument/2006/relationships" xmlns:c="http://schemas.openxmlformats.org/drawingml/2006/chart" r:id="R0e93601400b7478b"/>
+            <c:chart xmlns:r="http://schemas.openxmlformats.org/officeDocument/2006/relationships" xmlns:c="http://schemas.openxmlformats.org/drawingml/2006/chart" r:id="Rbcbd3b9ced2d402b"/>
           </a:graphicData>
         </a:graphic>
       </p:graphicFrame>
       <p:graphicFrame>
         <p:nvGraphicFramePr>
-          <p:cNvPr id="10013" name="value,category"/>
+          <p:cNvPr id="100013" name="value,category"/>
           <p:cNvGraphicFramePr/>
           <p:nvPr/>
         </p:nvGraphicFramePr>
@@ -6331,13 +6395,13 @@
         </p:xfrm>
         <a:graphic xmlns:a="http://schemas.openxmlformats.org/drawingml/2006/main">
           <a:graphicData uri="http://schemas.openxmlformats.org/drawingml/2006/chart">
-            <c:chart xmlns:r="http://schemas.openxmlformats.org/officeDocument/2006/relationships" xmlns:c="http://schemas.openxmlformats.org/drawingml/2006/chart" r:id="Rc39109d509264238"/>
+            <c:chart xmlns:r="http://schemas.openxmlformats.org/officeDocument/2006/relationships" xmlns:c="http://schemas.openxmlformats.org/drawingml/2006/chart" r:id="R20fca2cf7a4f4976"/>
           </a:graphicData>
         </a:graphic>
       </p:graphicFrame>
       <p:graphicFrame>
         <p:nvGraphicFramePr>
-          <p:cNvPr id="10014" name="dataLabels=none"/>
+          <p:cNvPr id="100014" name="dataLabels=none"/>
           <p:cNvGraphicFramePr/>
           <p:nvPr/>
         </p:nvGraphicFramePr>
@@ -6347,7 +6411,7 @@
         </p:xfrm>
         <a:graphic xmlns:a="http://schemas.openxmlformats.org/drawingml/2006/main">
           <a:graphicData uri="http://schemas.openxmlformats.org/drawingml/2006/chart">
-            <c:chart xmlns:r="http://schemas.openxmlformats.org/officeDocument/2006/relationships" xmlns:c="http://schemas.openxmlformats.org/drawingml/2006/chart" r:id="R5ddf3d5086794c50"/>
+            <c:chart xmlns:r="http://schemas.openxmlformats.org/officeDocument/2006/relationships" xmlns:c="http://schemas.openxmlformats.org/drawingml/2006/chart" r:id="R74c196156a60469b"/>
           </a:graphicData>
         </a:graphic>
       </p:graphicFrame>
@@ -6368,8 +6432,8 @@
       <p:grpSpPr/>
       <p:sp>
         <p:nvSpPr>
-          <p:cNvPr id="10015" name="TextBox 1"/>
-          <p:cNvSpPr/>
+          <p:cNvPr id="100015" name="TextBox 1"/>
+          <p:cNvSpPr txBox="1"/>
           <p:nvPr/>
         </p:nvSpPr>
         <p:spPr>
@@ -6396,7 +6460,7 @@
       </p:sp>
       <p:graphicFrame>
         <p:nvGraphicFramePr>
-          <p:cNvPr id="10016" name="min/max + titles"/>
+          <p:cNvPr id="100016" name="min/max + titles"/>
           <p:cNvGraphicFramePr/>
           <p:nvPr/>
         </p:nvGraphicFramePr>
@@ -6406,13 +6470,13 @@
         </p:xfrm>
         <a:graphic xmlns:a="http://schemas.openxmlformats.org/drawingml/2006/main">
           <a:graphicData uri="http://schemas.openxmlformats.org/drawingml/2006/chart">
-            <c:chart xmlns:r="http://schemas.openxmlformats.org/officeDocument/2006/relationships" xmlns:c="http://schemas.openxmlformats.org/drawingml/2006/chart" r:id="R67a8ccb75c394cc2"/>
+            <c:chart xmlns:r="http://schemas.openxmlformats.org/officeDocument/2006/relationships" xmlns:c="http://schemas.openxmlformats.org/drawingml/2006/chart" r:id="R273facc291604e90"/>
           </a:graphicData>
         </a:graphic>
       </p:graphicFrame>
       <p:graphicFrame>
         <p:nvGraphicFramePr>
-          <p:cNvPr id="10017" name="gridlines + minorGridlines"/>
+          <p:cNvPr id="100017" name="gridlines + minorGridlines"/>
           <p:cNvGraphicFramePr/>
           <p:nvPr/>
         </p:nvGraphicFramePr>
@@ -6422,13 +6486,13 @@
         </p:xfrm>
         <a:graphic xmlns:a="http://schemas.openxmlformats.org/drawingml/2006/main">
           <a:graphicData uri="http://schemas.openxmlformats.org/drawingml/2006/chart">
-            <c:chart xmlns:r="http://schemas.openxmlformats.org/officeDocument/2006/relationships" xmlns:c="http://schemas.openxmlformats.org/drawingml/2006/chart" r:id="Ra662f98fd5994f79"/>
+            <c:chart xmlns:r="http://schemas.openxmlformats.org/officeDocument/2006/relationships" xmlns:c="http://schemas.openxmlformats.org/drawingml/2006/chart" r:id="Raea0c1f771524ae5"/>
           </a:graphicData>
         </a:graphic>
       </p:graphicFrame>
       <p:graphicFrame>
         <p:nvGraphicFramePr>
-          <p:cNvPr id="10018" name="labelrotation=30"/>
+          <p:cNvPr id="100018" name="labelrotation=30"/>
           <p:cNvGraphicFramePr/>
           <p:nvPr/>
         </p:nvGraphicFramePr>
@@ -6438,13 +6502,13 @@
         </p:xfrm>
         <a:graphic xmlns:a="http://schemas.openxmlformats.org/drawingml/2006/main">
           <a:graphicData uri="http://schemas.openxmlformats.org/drawingml/2006/chart">
-            <c:chart xmlns:r="http://schemas.openxmlformats.org/officeDocument/2006/relationships" xmlns:c="http://schemas.openxmlformats.org/drawingml/2006/chart" r:id="R680596c14bbd4484"/>
+            <c:chart xmlns:r="http://schemas.openxmlformats.org/officeDocument/2006/relationships" xmlns:c="http://schemas.openxmlformats.org/drawingml/2006/chart" r:id="R165bf636edea4d7c"/>
           </a:graphicData>
         </a:graphic>
       </p:graphicFrame>
       <p:graphicFrame>
         <p:nvGraphicFramePr>
-          <p:cNvPr id="10019" name="axisnumfmt=0.0"/>
+          <p:cNvPr id="100019" name="axisnumfmt=0.0"/>
           <p:cNvGraphicFramePr/>
           <p:nvPr/>
         </p:nvGraphicFramePr>
@@ -6454,7 +6518,7 @@
         </p:xfrm>
         <a:graphic xmlns:a="http://schemas.openxmlformats.org/drawingml/2006/main">
           <a:graphicData uri="http://schemas.openxmlformats.org/drawingml/2006/chart">
-            <c:chart xmlns:r="http://schemas.openxmlformats.org/officeDocument/2006/relationships" xmlns:c="http://schemas.openxmlformats.org/drawingml/2006/chart" r:id="R4a44d78ade1c4794"/>
+            <c:chart xmlns:r="http://schemas.openxmlformats.org/officeDocument/2006/relationships" xmlns:c="http://schemas.openxmlformats.org/drawingml/2006/chart" r:id="R1e731c8c85b74db2"/>
           </a:graphicData>
         </a:graphic>
       </p:graphicFrame>
@@ -6475,8 +6539,8 @@
       <p:grpSpPr/>
       <p:sp>
         <p:nvSpPr>
-          <p:cNvPr id="10020" name="TextBox 1"/>
-          <p:cNvSpPr/>
+          <p:cNvPr id="100020" name="TextBox 1"/>
+          <p:cNvSpPr txBox="1"/>
           <p:nvPr/>
         </p:nvSpPr>
         <p:spPr>
@@ -6503,7 +6567,7 @@
       </p:sp>
       <p:graphicFrame>
         <p:nvGraphicFramePr>
-          <p:cNvPr id="10021" name="colors + seriesoutline"/>
+          <p:cNvPr id="100021" name="colors + seriesoutline"/>
           <p:cNvGraphicFramePr/>
           <p:nvPr/>
         </p:nvGraphicFramePr>
@@ -6513,13 +6577,13 @@
         </p:xfrm>
         <a:graphic xmlns:a="http://schemas.openxmlformats.org/drawingml/2006/main">
           <a:graphicData uri="http://schemas.openxmlformats.org/drawingml/2006/chart">
-            <c:chart xmlns:r="http://schemas.openxmlformats.org/officeDocument/2006/relationships" xmlns:c="http://schemas.openxmlformats.org/drawingml/2006/chart" r:id="R610f4f0f6d074f67"/>
+            <c:chart xmlns:r="http://schemas.openxmlformats.org/officeDocument/2006/relationships" xmlns:c="http://schemas.openxmlformats.org/drawingml/2006/chart" r:id="R08656f156fe74fe2"/>
           </a:graphicData>
         </a:graphic>
       </p:graphicFrame>
       <p:graphicFrame>
         <p:nvGraphicFramePr>
-          <p:cNvPr id="10022" name="gradient + seriesshadow"/>
+          <p:cNvPr id="100022" name="gradient + seriesshadow"/>
           <p:cNvGraphicFramePr/>
           <p:nvPr/>
         </p:nvGraphicFramePr>
@@ -6529,13 +6593,13 @@
         </p:xfrm>
         <a:graphic xmlns:a="http://schemas.openxmlformats.org/drawingml/2006/main">
           <a:graphicData uri="http://schemas.openxmlformats.org/drawingml/2006/chart">
-            <c:chart xmlns:r="http://schemas.openxmlformats.org/officeDocument/2006/relationships" xmlns:c="http://schemas.openxmlformats.org/drawingml/2006/chart" r:id="R5cbce870dbd14930"/>
+            <c:chart xmlns:r="http://schemas.openxmlformats.org/officeDocument/2006/relationships" xmlns:c="http://schemas.openxmlformats.org/drawingml/2006/chart" r:id="R1d3a42da13804231"/>
           </a:graphicData>
         </a:graphic>
       </p:graphicFrame>
       <p:graphicFrame>
         <p:nvGraphicFramePr>
-          <p:cNvPr id="10023" name="transparency=40"/>
+          <p:cNvPr id="100023" name="transparency=40"/>
           <p:cNvGraphicFramePr/>
           <p:nvPr/>
         </p:nvGraphicFramePr>
@@ -6545,13 +6609,13 @@
         </p:xfrm>
         <a:graphic xmlns:a="http://schemas.openxmlformats.org/drawingml/2006/main">
           <a:graphicData uri="http://schemas.openxmlformats.org/drawingml/2006/chart">
-            <c:chart xmlns:r="http://schemas.openxmlformats.org/officeDocument/2006/relationships" xmlns:c="http://schemas.openxmlformats.org/drawingml/2006/chart" r:id="Rfb9a3832ca8840c9"/>
+            <c:chart xmlns:r="http://schemas.openxmlformats.org/officeDocument/2006/relationships" xmlns:c="http://schemas.openxmlformats.org/drawingml/2006/chart" r:id="Rb9f7f4fa645945f8"/>
           </a:graphicData>
         </a:graphic>
       </p:graphicFrame>
       <p:graphicFrame>
         <p:nvGraphicFramePr>
-          <p:cNvPr id="10024" name="per-series gradients"/>
+          <p:cNvPr id="100024" name="per-series gradients"/>
           <p:cNvGraphicFramePr/>
           <p:nvPr/>
         </p:nvGraphicFramePr>
@@ -6561,7 +6625,7 @@
         </p:xfrm>
         <a:graphic xmlns:a="http://schemas.openxmlformats.org/drawingml/2006/main">
           <a:graphicData uri="http://schemas.openxmlformats.org/drawingml/2006/chart">
-            <c:chart xmlns:r="http://schemas.openxmlformats.org/officeDocument/2006/relationships" xmlns:c="http://schemas.openxmlformats.org/drawingml/2006/chart" r:id="R99a5246d2d384e5f"/>
+            <c:chart xmlns:r="http://schemas.openxmlformats.org/officeDocument/2006/relationships" xmlns:c="http://schemas.openxmlformats.org/drawingml/2006/chart" r:id="Rc6dd3839833c4b84"/>
           </a:graphicData>
         </a:graphic>
       </p:graphicFrame>
@@ -6582,8 +6646,8 @@
       <p:grpSpPr/>
       <p:sp>
         <p:nvSpPr>
-          <p:cNvPr id="10025" name="TextBox 1"/>
-          <p:cNvSpPr/>
+          <p:cNvPr id="100025" name="TextBox 1"/>
+          <p:cNvSpPr txBox="1"/>
           <p:nvPr/>
         </p:nvSpPr>
         <p:spPr>
@@ -6610,7 +6674,7 @@
       </p:sp>
       <p:graphicFrame>
         <p:nvGraphicFramePr>
-          <p:cNvPr id="10026" name="circle:10:FF0000"/>
+          <p:cNvPr id="100026" name="circle:10:FF0000"/>
           <p:cNvGraphicFramePr/>
           <p:nvPr/>
         </p:nvGraphicFramePr>
@@ -6620,13 +6684,13 @@
         </p:xfrm>
         <a:graphic xmlns:a="http://schemas.openxmlformats.org/drawingml/2006/main">
           <a:graphicData uri="http://schemas.openxmlformats.org/drawingml/2006/chart">
-            <c:chart xmlns:r="http://schemas.openxmlformats.org/officeDocument/2006/relationships" xmlns:c="http://schemas.openxmlformats.org/drawingml/2006/chart" r:id="R51aba6fc7aa64fb6"/>
+            <c:chart xmlns:r="http://schemas.openxmlformats.org/officeDocument/2006/relationships" xmlns:c="http://schemas.openxmlformats.org/drawingml/2006/chart" r:id="R0f28e76ae0be4a83"/>
           </a:graphicData>
         </a:graphic>
       </p:graphicFrame>
       <p:graphicFrame>
         <p:nvGraphicFramePr>
-          <p:cNvPr id="10027" name="square:8:0070C0"/>
+          <p:cNvPr id="100027" name="square:8:0070C0"/>
           <p:cNvGraphicFramePr/>
           <p:nvPr/>
         </p:nvGraphicFramePr>
@@ -6636,13 +6700,13 @@
         </p:xfrm>
         <a:graphic xmlns:a="http://schemas.openxmlformats.org/drawingml/2006/main">
           <a:graphicData uri="http://schemas.openxmlformats.org/drawingml/2006/chart">
-            <c:chart xmlns:r="http://schemas.openxmlformats.org/officeDocument/2006/relationships" xmlns:c="http://schemas.openxmlformats.org/drawingml/2006/chart" r:id="Rba1fc44b8ab240df"/>
+            <c:chart xmlns:r="http://schemas.openxmlformats.org/officeDocument/2006/relationships" xmlns:c="http://schemas.openxmlformats.org/drawingml/2006/chart" r:id="R22ff649962d5439a"/>
           </a:graphicData>
         </a:graphic>
       </p:graphicFrame>
       <p:graphicFrame>
         <p:nvGraphicFramePr>
-          <p:cNvPr id="10028" name="diamond:12"/>
+          <p:cNvPr id="100028" name="diamond:12"/>
           <p:cNvGraphicFramePr/>
           <p:nvPr/>
         </p:nvGraphicFramePr>
@@ -6652,13 +6716,13 @@
         </p:xfrm>
         <a:graphic xmlns:a="http://schemas.openxmlformats.org/drawingml/2006/main">
           <a:graphicData uri="http://schemas.openxmlformats.org/drawingml/2006/chart">
-            <c:chart xmlns:r="http://schemas.openxmlformats.org/officeDocument/2006/relationships" xmlns:c="http://schemas.openxmlformats.org/drawingml/2006/chart" r:id="R6472695cbdcf43a8"/>
+            <c:chart xmlns:r="http://schemas.openxmlformats.org/officeDocument/2006/relationships" xmlns:c="http://schemas.openxmlformats.org/drawingml/2006/chart" r:id="R92f886d265f141c4"/>
           </a:graphicData>
         </a:graphic>
       </p:graphicFrame>
       <p:graphicFrame>
         <p:nvGraphicFramePr>
-          <p:cNvPr id="10029" name="triangle:10:70AD47"/>
+          <p:cNvPr id="100029" name="triangle:10:70AD47"/>
           <p:cNvGraphicFramePr/>
           <p:nvPr/>
         </p:nvGraphicFramePr>
@@ -6668,7 +6732,7 @@
         </p:xfrm>
         <a:graphic xmlns:a="http://schemas.openxmlformats.org/drawingml/2006/main">
           <a:graphicData uri="http://schemas.openxmlformats.org/drawingml/2006/chart">
-            <c:chart xmlns:r="http://schemas.openxmlformats.org/officeDocument/2006/relationships" xmlns:c="http://schemas.openxmlformats.org/drawingml/2006/chart" r:id="R095f2db8c8fc4cfe"/>
+            <c:chart xmlns:r="http://schemas.openxmlformats.org/officeDocument/2006/relationships" xmlns:c="http://schemas.openxmlformats.org/drawingml/2006/chart" r:id="Rcbbc03637bd44568"/>
           </a:graphicData>
         </a:graphic>
       </p:graphicFrame>
@@ -6689,8 +6753,8 @@
       <p:grpSpPr/>
       <p:sp>
         <p:nvSpPr>
-          <p:cNvPr id="10030" name="TextBox 1"/>
-          <p:cNvSpPr/>
+          <p:cNvPr id="100030" name="TextBox 1"/>
+          <p:cNvSpPr txBox="1"/>
           <p:nvPr/>
         </p:nvSpPr>
         <p:spPr>
@@ -6717,7 +6781,7 @@
       </p:sp>
       <p:graphicFrame>
         <p:nvGraphicFramePr>
-          <p:cNvPr id="10031" name="chartareafill + plotFill + borders"/>
+          <p:cNvPr id="100031" name="chartareafill + plotFill + borders"/>
           <p:cNvGraphicFramePr/>
           <p:nvPr/>
         </p:nvGraphicFramePr>
@@ -6727,13 +6791,13 @@
         </p:xfrm>
         <a:graphic xmlns:a="http://schemas.openxmlformats.org/drawingml/2006/main">
           <a:graphicData uri="http://schemas.openxmlformats.org/drawingml/2006/chart">
-            <c:chart xmlns:r="http://schemas.openxmlformats.org/officeDocument/2006/relationships" xmlns:c="http://schemas.openxmlformats.org/drawingml/2006/chart" r:id="R3952342bba8744a4"/>
+            <c:chart xmlns:r="http://schemas.openxmlformats.org/officeDocument/2006/relationships" xmlns:c="http://schemas.openxmlformats.org/drawingml/2006/chart" r:id="R3ff6375b48484001"/>
           </a:graphicData>
         </a:graphic>
       </p:graphicFrame>
       <p:graphicFrame>
         <p:nvGraphicFramePr>
-          <p:cNvPr id="10032" name="roundedcorners=true"/>
+          <p:cNvPr id="100032" name="roundedcorners=true"/>
           <p:cNvGraphicFramePr/>
           <p:nvPr/>
         </p:nvGraphicFramePr>
@@ -6743,13 +6807,13 @@
         </p:xfrm>
         <a:graphic xmlns:a="http://schemas.openxmlformats.org/drawingml/2006/main">
           <a:graphicData uri="http://schemas.openxmlformats.org/drawingml/2006/chart">
-            <c:chart xmlns:r="http://schemas.openxmlformats.org/officeDocument/2006/relationships" xmlns:c="http://schemas.openxmlformats.org/drawingml/2006/chart" r:id="R708d13d34f7342d7"/>
+            <c:chart xmlns:r="http://schemas.openxmlformats.org/officeDocument/2006/relationships" xmlns:c="http://schemas.openxmlformats.org/drawingml/2006/chart" r:id="Rf575b60a0c1146de"/>
           </a:graphicData>
         </a:graphic>
       </p:graphicFrame>
       <p:graphicFrame>
         <p:nvGraphicFramePr>
-          <p:cNvPr id="10033" name="plotFill=none"/>
+          <p:cNvPr id="100033" name="plotFill=none"/>
           <p:cNvGraphicFramePr/>
           <p:nvPr/>
         </p:nvGraphicFramePr>
@@ -6759,13 +6823,13 @@
         </p:xfrm>
         <a:graphic xmlns:a="http://schemas.openxmlformats.org/drawingml/2006/main">
           <a:graphicData uri="http://schemas.openxmlformats.org/drawingml/2006/chart">
-            <c:chart xmlns:r="http://schemas.openxmlformats.org/officeDocument/2006/relationships" xmlns:c="http://schemas.openxmlformats.org/drawingml/2006/chart" r:id="R05fd1a8d146b4f9e"/>
+            <c:chart xmlns:r="http://schemas.openxmlformats.org/officeDocument/2006/relationships" xmlns:c="http://schemas.openxmlformats.org/drawingml/2006/chart" r:id="Rf45893f04d3e440e"/>
           </a:graphicData>
         </a:graphic>
       </p:graphicFrame>
       <p:graphicFrame>
         <p:nvGraphicFramePr>
-          <p:cNvPr id="10034" name="chartareafill=none"/>
+          <p:cNvPr id="100034" name="chartareafill=none"/>
           <p:cNvGraphicFramePr/>
           <p:nvPr/>
         </p:nvGraphicFramePr>
@@ -6775,7 +6839,7 @@
         </p:xfrm>
         <a:graphic xmlns:a="http://schemas.openxmlformats.org/drawingml/2006/main">
           <a:graphicData uri="http://schemas.openxmlformats.org/drawingml/2006/chart">
-            <c:chart xmlns:r="http://schemas.openxmlformats.org/officeDocument/2006/relationships" xmlns:c="http://schemas.openxmlformats.org/drawingml/2006/chart" r:id="Ref71bdabec54438c"/>
+            <c:chart xmlns:r="http://schemas.openxmlformats.org/officeDocument/2006/relationships" xmlns:c="http://schemas.openxmlformats.org/drawingml/2006/chart" r:id="Rc9b8a443f17c4ce3"/>
           </a:graphicData>
         </a:graphic>
       </p:graphicFrame>
@@ -6796,8 +6860,8 @@
       <p:grpSpPr/>
       <p:sp>
         <p:nvSpPr>
-          <p:cNvPr id="10035" name="TextBox 1"/>
-          <p:cNvSpPr/>
+          <p:cNvPr id="100035" name="TextBox 1"/>
+          <p:cNvSpPr txBox="1"/>
           <p:nvPr/>
         </p:nvSpPr>
         <p:spPr>
@@ -6824,7 +6888,7 @@
       </p:sp>
       <p:graphicFrame>
         <p:nvGraphicFramePr>
-          <p:cNvPr id="10036" name="preset=minimal"/>
+          <p:cNvPr id="100036" name="preset=minimal"/>
           <p:cNvGraphicFramePr/>
           <p:nvPr/>
         </p:nvGraphicFramePr>
@@ -6834,13 +6898,13 @@
         </p:xfrm>
         <a:graphic xmlns:a="http://schemas.openxmlformats.org/drawingml/2006/main">
           <a:graphicData uri="http://schemas.openxmlformats.org/drawingml/2006/chart">
-            <c:chart xmlns:r="http://schemas.openxmlformats.org/officeDocument/2006/relationships" xmlns:c="http://schemas.openxmlformats.org/drawingml/2006/chart" r:id="Re1036d1874ba440b"/>
+            <c:chart xmlns:r="http://schemas.openxmlformats.org/officeDocument/2006/relationships" xmlns:c="http://schemas.openxmlformats.org/drawingml/2006/chart" r:id="Rdd247265840b42a0"/>
           </a:graphicData>
         </a:graphic>
       </p:graphicFrame>
       <p:graphicFrame>
         <p:nvGraphicFramePr>
-          <p:cNvPr id="10037" name="preset=dark"/>
+          <p:cNvPr id="100037" name="preset=dark"/>
           <p:cNvGraphicFramePr/>
           <p:nvPr/>
         </p:nvGraphicFramePr>
@@ -6850,13 +6914,13 @@
         </p:xfrm>
         <a:graphic xmlns:a="http://schemas.openxmlformats.org/drawingml/2006/main">
           <a:graphicData uri="http://schemas.openxmlformats.org/drawingml/2006/chart">
-            <c:chart xmlns:r="http://schemas.openxmlformats.org/officeDocument/2006/relationships" xmlns:c="http://schemas.openxmlformats.org/drawingml/2006/chart" r:id="Re4af0ee6edc34db3"/>
+            <c:chart xmlns:r="http://schemas.openxmlformats.org/officeDocument/2006/relationships" xmlns:c="http://schemas.openxmlformats.org/drawingml/2006/chart" r:id="R008842ba46a44380"/>
           </a:graphicData>
         </a:graphic>
       </p:graphicFrame>
       <p:graphicFrame>
         <p:nvGraphicFramePr>
-          <p:cNvPr id="10038" name="preset=corporate"/>
+          <p:cNvPr id="100038" name="preset=corporate"/>
           <p:cNvGraphicFramePr/>
           <p:nvPr/>
         </p:nvGraphicFramePr>
@@ -6866,13 +6930,13 @@
         </p:xfrm>
         <a:graphic xmlns:a="http://schemas.openxmlformats.org/drawingml/2006/main">
           <a:graphicData uri="http://schemas.openxmlformats.org/drawingml/2006/chart">
-            <c:chart xmlns:r="http://schemas.openxmlformats.org/officeDocument/2006/relationships" xmlns:c="http://schemas.openxmlformats.org/drawingml/2006/chart" r:id="Rf0bb62c4a2be484e"/>
+            <c:chart xmlns:r="http://schemas.openxmlformats.org/officeDocument/2006/relationships" xmlns:c="http://schemas.openxmlformats.org/drawingml/2006/chart" r:id="R7673be9a553140d9"/>
           </a:graphicData>
         </a:graphic>
       </p:graphicFrame>
       <p:graphicFrame>
         <p:nvGraphicFramePr>
-          <p:cNvPr id="10039" name="chart-series Set"/>
+          <p:cNvPr id="100039" name="chart-series Set"/>
           <p:cNvGraphicFramePr/>
           <p:nvPr/>
         </p:nvGraphicFramePr>
@@ -6882,7 +6946,7 @@
         </p:xfrm>
         <a:graphic xmlns:a="http://schemas.openxmlformats.org/drawingml/2006/main">
           <a:graphicData uri="http://schemas.openxmlformats.org/drawingml/2006/chart">
-            <c:chart xmlns:r="http://schemas.openxmlformats.org/officeDocument/2006/relationships" xmlns:c="http://schemas.openxmlformats.org/drawingml/2006/chart" r:id="Rac6fb0d09cf34f7d"/>
+            <c:chart xmlns:r="http://schemas.openxmlformats.org/officeDocument/2006/relationships" xmlns:c="http://schemas.openxmlformats.org/drawingml/2006/chart" r:id="Rff3e4861ad894973"/>
           </a:graphicData>
         </a:graphic>
       </p:graphicFrame>
